--- a/slides/presentation.pptx
+++ b/slides/presentation.pptx
@@ -14,7 +14,6 @@
     <p:sldId id="262" r:id="rId13"/>
     <p:sldId id="263" r:id="rId14"/>
     <p:sldId id="264" r:id="rId15"/>
-    <p:sldId id="265" r:id="rId16"/>
   </p:sldIdLst>
   <p:sldSz cx="12191695" cy="6858000" type="screen4x3"/>
   <p:notesSz cx="6858000" cy="9144000"/>
@@ -3345,314 +3344,6 @@
 </p:sld>
 </file>
 
-<file path=ppt/slides/slide10.xml><?xml version="1.0" encoding="utf-8"?>
-<p:sld xmlns:a="http://schemas.openxmlformats.org/drawingml/2006/main" xmlns:p="http://schemas.openxmlformats.org/presentationml/2006/main" xmlns:r="http://schemas.openxmlformats.org/officeDocument/2006/relationships">
-  <p:cSld>
-    <p:spTree>
-      <p:nvGrpSpPr>
-        <p:cNvPr id="1" name=""/>
-        <p:cNvGrpSpPr/>
-        <p:nvPr/>
-      </p:nvGrpSpPr>
-      <p:grpSpPr/>
-      <p:sp>
-        <p:nvSpPr>
-          <p:cNvPr id="2" name="TextBox 1"/>
-          <p:cNvSpPr txBox="1"/>
-          <p:nvPr/>
-        </p:nvSpPr>
-        <p:spPr>
-          <a:xfrm>
-            <a:off x="502920" y="274320"/>
-            <a:ext cx="11155680" cy="731520"/>
-          </a:xfrm>
-          <a:prstGeom prst="rect">
-            <a:avLst/>
-          </a:prstGeom>
-          <a:noFill/>
-        </p:spPr>
-        <p:txBody>
-          <a:bodyPr wrap="square" anchor="t">
-            <a:spAutoFit/>
-          </a:bodyPr>
-          <a:lstStyle/>
-          <a:p>
-            <a:pPr algn="l">
-              <a:spcAft>
-                <a:spcPts val="0"/>
-              </a:spcAft>
-            </a:pPr>
-            <a:r>
-              <a:rPr sz="2600" b="1">
-                <a:solidFill>
-                  <a:srgbClr val="2563EB"/>
-                </a:solidFill>
-                <a:latin typeface="Microsoft YaHei"/>
-                <a:ea typeface="Microsoft YaHei"/>
-              </a:rPr>
-              <a:t>总结</a:t>
-            </a:r>
-          </a:p>
-        </p:txBody>
-      </p:sp>
-      <p:sp>
-        <p:nvSpPr>
-          <p:cNvPr id="3" name="TextBox 2"/>
-          <p:cNvSpPr txBox="1"/>
-          <p:nvPr/>
-        </p:nvSpPr>
-        <p:spPr>
-          <a:xfrm>
-            <a:off x="777240" y="1417320"/>
-            <a:ext cx="10607040" cy="822960"/>
-          </a:xfrm>
-          <a:prstGeom prst="rect">
-            <a:avLst/>
-          </a:prstGeom>
-          <a:noFill/>
-        </p:spPr>
-        <p:txBody>
-          <a:bodyPr wrap="square">
-            <a:spAutoFit/>
-          </a:bodyPr>
-          <a:lstStyle/>
-          <a:p>
-            <a:r>
-              <a:rPr sz="1700" b="1">
-                <a:solidFill>
-                  <a:srgbClr val="2563EB"/>
-                </a:solidFill>
-                <a:latin typeface="Microsoft YaHei"/>
-                <a:ea typeface="Microsoft YaHei"/>
-              </a:rPr>
-              <a:t>●  </a:t>
-            </a:r>
-            <a:r>
-              <a:rPr sz="1700" b="0">
-                <a:solidFill>
-                  <a:srgbClr val="1E1E1E"/>
-                </a:solidFill>
-                <a:latin typeface="Microsoft YaHei"/>
-                <a:ea typeface="Microsoft YaHei"/>
-              </a:rPr>
-              <a:t>训练-free RIS 的瓶颈不是 mask 质量，而是</a:t>
-            </a:r>
-            <a:r>
-              <a:rPr sz="1700" b="1">
-                <a:solidFill>
-                  <a:srgbClr val="1E1E1E"/>
-                </a:solidFill>
-                <a:latin typeface="Microsoft YaHei"/>
-                <a:ea typeface="Microsoft YaHei"/>
-              </a:rPr>
-              <a:t>选择（localization）</a:t>
-            </a:r>
-            <a:r>
-              <a:rPr sz="1700" b="0">
-                <a:solidFill>
-                  <a:srgbClr val="1E1E1E"/>
-                </a:solidFill>
-                <a:latin typeface="Microsoft YaHei"/>
-                <a:ea typeface="Microsoft YaHei"/>
-              </a:rPr>
-              <a:t>——oracle 分解实测</a:t>
-            </a:r>
-          </a:p>
-        </p:txBody>
-      </p:sp>
-      <p:sp>
-        <p:nvSpPr>
-          <p:cNvPr id="4" name="TextBox 3"/>
-          <p:cNvSpPr txBox="1"/>
-          <p:nvPr/>
-        </p:nvSpPr>
-        <p:spPr>
-          <a:xfrm>
-            <a:off x="777240" y="2377440"/>
-            <a:ext cx="10607040" cy="822960"/>
-          </a:xfrm>
-          <a:prstGeom prst="rect">
-            <a:avLst/>
-          </a:prstGeom>
-          <a:noFill/>
-        </p:spPr>
-        <p:txBody>
-          <a:bodyPr wrap="square">
-            <a:spAutoFit/>
-          </a:bodyPr>
-          <a:lstStyle/>
-          <a:p>
-            <a:r>
-              <a:rPr sz="1700" b="1">
-                <a:solidFill>
-                  <a:srgbClr val="2563EB"/>
-                </a:solidFill>
-                <a:latin typeface="Microsoft YaHei"/>
-                <a:ea typeface="Microsoft YaHei"/>
-              </a:rPr>
-              <a:t>●  </a:t>
-            </a:r>
-            <a:r>
-              <a:rPr sz="1700" b="0">
-                <a:solidFill>
-                  <a:srgbClr val="1E1E1E"/>
-                </a:solidFill>
-                <a:latin typeface="Microsoft YaHei"/>
-                <a:ea typeface="Microsoft YaHei"/>
-              </a:rPr>
-              <a:t>冻结 VLM 的</a:t>
-            </a:r>
-            <a:r>
-              <a:rPr sz="1700" b="1">
-                <a:solidFill>
-                  <a:srgbClr val="1E1E1E"/>
-                </a:solidFill>
-                <a:latin typeface="Microsoft YaHei"/>
-                <a:ea typeface="Microsoft YaHei"/>
-              </a:rPr>
-              <a:t>全句 box 先验</a:t>
-            </a:r>
-            <a:r>
-              <a:rPr sz="1700" b="0">
-                <a:solidFill>
-                  <a:srgbClr val="1E1E1E"/>
-                </a:solidFill>
-                <a:latin typeface="Microsoft YaHei"/>
-                <a:ea typeface="Microsoft YaHei"/>
-              </a:rPr>
-              <a:t>把“选”修好；替代方案全部测过并被淘汰</a:t>
-            </a:r>
-          </a:p>
-        </p:txBody>
-      </p:sp>
-      <p:sp>
-        <p:nvSpPr>
-          <p:cNvPr id="5" name="TextBox 4"/>
-          <p:cNvSpPr txBox="1"/>
-          <p:nvPr/>
-        </p:nvSpPr>
-        <p:spPr>
-          <a:xfrm>
-            <a:off x="777240" y="3337560"/>
-            <a:ext cx="10607040" cy="822960"/>
-          </a:xfrm>
-          <a:prstGeom prst="rect">
-            <a:avLst/>
-          </a:prstGeom>
-          <a:noFill/>
-        </p:spPr>
-        <p:txBody>
-          <a:bodyPr wrap="square">
-            <a:spAutoFit/>
-          </a:bodyPr>
-          <a:lstStyle/>
-          <a:p>
-            <a:r>
-              <a:rPr sz="1700" b="1">
-                <a:solidFill>
-                  <a:srgbClr val="2563EB"/>
-                </a:solidFill>
-                <a:latin typeface="Microsoft YaHei"/>
-                <a:ea typeface="Microsoft YaHei"/>
-              </a:rPr>
-              <a:t>●  </a:t>
-            </a:r>
-            <a:r>
-              <a:rPr sz="1700" b="0">
-                <a:solidFill>
-                  <a:srgbClr val="1E1E1E"/>
-                </a:solidFill>
-                <a:latin typeface="Microsoft YaHei"/>
-                <a:ea typeface="Microsoft YaHei"/>
-              </a:rPr>
-              <a:t>组件审计后</a:t>
-            </a:r>
-            <a:r>
-              <a:rPr sz="1700" b="1">
-                <a:solidFill>
-                  <a:srgbClr val="1E1E1E"/>
-                </a:solidFill>
-                <a:latin typeface="Microsoft YaHei"/>
-                <a:ea typeface="Microsoft YaHei"/>
-              </a:rPr>
-              <a:t>自研选择头上位</a:t>
-            </a:r>
-            <a:r>
-              <a:rPr sz="1700" b="0">
-                <a:solidFill>
-                  <a:srgbClr val="1E1E1E"/>
-                </a:solidFill>
-                <a:latin typeface="Microsoft YaHei"/>
-                <a:ea typeface="Microsoft YaHei"/>
-              </a:rPr>
-              <a:t>，模型大头为本工作 → </a:t>
-            </a:r>
-            <a:r>
-              <a:rPr sz="1700" b="1">
-                <a:solidFill>
-                  <a:srgbClr val="1E1E1E"/>
-                </a:solidFill>
-                <a:latin typeface="Microsoft YaHei"/>
-                <a:ea typeface="Microsoft YaHei"/>
-              </a:rPr>
-              <a:t>16/16 全线超 published 旗舰</a:t>
-            </a:r>
-          </a:p>
-        </p:txBody>
-      </p:sp>
-      <p:sp>
-        <p:nvSpPr>
-          <p:cNvPr id="6" name="TextBox 5"/>
-          <p:cNvSpPr txBox="1"/>
-          <p:nvPr/>
-        </p:nvSpPr>
-        <p:spPr>
-          <a:xfrm>
-            <a:off x="777240" y="4297680"/>
-            <a:ext cx="10607040" cy="822960"/>
-          </a:xfrm>
-          <a:prstGeom prst="rect">
-            <a:avLst/>
-          </a:prstGeom>
-          <a:noFill/>
-        </p:spPr>
-        <p:txBody>
-          <a:bodyPr wrap="square">
-            <a:spAutoFit/>
-          </a:bodyPr>
-          <a:lstStyle/>
-          <a:p>
-            <a:r>
-              <a:rPr sz="1700" b="1">
-                <a:solidFill>
-                  <a:srgbClr val="2563EB"/>
-                </a:solidFill>
-                <a:latin typeface="Microsoft YaHei"/>
-                <a:ea typeface="Microsoft YaHei"/>
-              </a:rPr>
-              <a:t>●  </a:t>
-            </a:r>
-            <a:r>
-              <a:rPr sz="1700" b="0">
-                <a:solidFill>
-                  <a:srgbClr val="1E1E1E"/>
-                </a:solidFill>
-                <a:latin typeface="Microsoft YaHei"/>
-                <a:ea typeface="Microsoft YaHei"/>
-              </a:rPr>
-              <a:t>下一步：backbone 削弱验证 → 投稿；视频侧同类“proxy→val 反转”现象已完成测量</a:t>
-            </a:r>
-          </a:p>
-        </p:txBody>
-      </p:sp>
-    </p:spTree>
-  </p:cSld>
-  <p:clrMapOvr>
-    <a:masterClrMapping/>
-  </p:clrMapOvr>
-</p:sld>
-</file>
-
 <file path=ppt/slides/slide2.xml><?xml version="1.0" encoding="utf-8"?>
 <p:sld xmlns:a="http://schemas.openxmlformats.org/drawingml/2006/main" xmlns:p="http://schemas.openxmlformats.org/presentationml/2006/main" xmlns:r="http://schemas.openxmlformats.org/officeDocument/2006/relationships">
   <p:cSld>
@@ -3966,7 +3657,7 @@
                 <a:latin typeface="Microsoft YaHei"/>
                 <a:ea typeface="Microsoft YaHei"/>
               </a:rPr>
-              <a:t>诊断一：旗舰方法不可复现，规则本身有害</a:t>
+              <a:t>诊断：瓶颈是 selection，不是 mask 质量</a:t>
             </a:r>
           </a:p>
         </p:txBody>
@@ -4011,7 +3702,7 @@
                 <a:latin typeface="Microsoft YaHei"/>
                 <a:ea typeface="Microsoft YaHei"/>
               </a:rPr>
-              <a:t>独立复现 GLOD-RIS（两套实现、同款 GLM-4.1V 引导）：</a:t>
+              <a:t>oracle：池中最好 mask 达 </a:t>
             </a:r>
             <a:r>
               <a:rPr sz="1700" b="1">
@@ -4021,7 +3712,7 @@
                 <a:latin typeface="Microsoft YaHei"/>
                 <a:ea typeface="Microsoft YaHei"/>
               </a:rPr>
-              <a:t>32.68 / 30.96 / 37.24</a:t>
+              <a:t>82.21 mIoU</a:t>
             </a:r>
             <a:r>
               <a:rPr sz="1700" b="0">
@@ -4031,7 +3722,7 @@
                 <a:latin typeface="Microsoft YaHei"/>
                 <a:ea typeface="Microsoft YaHei"/>
               </a:rPr>
-              <a:t>——差 </a:t>
+              <a:t>（82% 表达式池里已有好 mask）；所基于的 HybridGL released pipeline 只拿到 </a:t>
             </a:r>
             <a:r>
               <a:rPr sz="1700" b="1">
@@ -4041,7 +3732,7 @@
                 <a:latin typeface="Microsoft YaHei"/>
                 <a:ea typeface="Microsoft YaHei"/>
               </a:rPr>
-              <a:t>−20 ~ −26</a:t>
+              <a:t>44.82</a:t>
             </a:r>
           </a:p>
         </p:txBody>
@@ -4086,7 +3777,7 @@
                 <a:latin typeface="Microsoft YaHei"/>
                 <a:ea typeface="Microsoft YaHei"/>
               </a:rPr>
-              <a:t>因果隔离（rule-swap）：把它的选择规则放到</a:t>
+              <a:t>可回收 IoU 的构成：</a:t>
             </a:r>
             <a:r>
               <a:rPr sz="1700" b="1">
@@ -4096,7 +3787,7 @@
                 <a:latin typeface="Microsoft YaHei"/>
                 <a:ea typeface="Microsoft YaHei"/>
               </a:rPr>
-              <a:t>我们完全相同的候选池与特征</a:t>
+              <a:t>wrong-instance（选错实例）主导</a:t>
             </a:r>
             <a:r>
               <a:rPr sz="1700" b="0">
@@ -4106,27 +3797,7 @@
                 <a:latin typeface="Microsoft YaHei"/>
                 <a:ea typeface="Microsoft YaHei"/>
               </a:rPr>
-              <a:t>上 → 仍不如无引导 scorer（</a:t>
-            </a:r>
-            <a:r>
-              <a:rPr sz="1700" b="1">
-                <a:solidFill>
-                  <a:srgbClr val="1E1E1E"/>
-                </a:solidFill>
-                <a:latin typeface="Microsoft YaHei"/>
-                <a:ea typeface="Microsoft YaHei"/>
-              </a:rPr>
-              <a:t>32.9 vs 44.8</a:t>
-            </a:r>
-            <a:r>
-              <a:rPr sz="1700" b="0">
-                <a:solidFill>
-                  <a:srgbClr val="1E1E1E"/>
-                </a:solidFill>
-                <a:latin typeface="Microsoft YaHei"/>
-                <a:ea typeface="Microsoft YaHei"/>
-              </a:rPr>
-              <a:t>，同池同特征）</a:t>
+              <a:t>；under-segmentation 只占小头——现有工作多聚焦 mask 质量与合并</a:t>
             </a:r>
           </a:p>
         </p:txBody>
@@ -4171,7 +3842,27 @@
                 <a:latin typeface="Microsoft YaHei"/>
                 <a:ea typeface="Microsoft YaHei"/>
               </a:rPr>
-              <a:t>结论：坏的不是环境，是“选”的机制本身</a:t>
+              <a:t>更强 encoder 不解决：SigLIP-so400m 反而</a:t>
+            </a:r>
+            <a:r>
+              <a:rPr sz="1700" b="1">
+                <a:solidFill>
+                  <a:srgbClr val="1E1E1E"/>
+                </a:solidFill>
+                <a:latin typeface="Microsoft YaHei"/>
+                <a:ea typeface="Microsoft YaHei"/>
+              </a:rPr>
+              <a:t>更差</a:t>
+            </a:r>
+            <a:r>
+              <a:rPr sz="1700" b="0">
+                <a:solidFill>
+                  <a:srgbClr val="1E1E1E"/>
+                </a:solidFill>
+                <a:latin typeface="Microsoft YaHei"/>
+                <a:ea typeface="Microsoft YaHei"/>
+              </a:rPr>
+              <a:t>（36.5 vs 40.4）</a:t>
             </a:r>
           </a:p>
         </p:txBody>
@@ -4216,7 +3907,27 @@
                 <a:latin typeface="Microsoft YaHei"/>
                 <a:ea typeface="Microsoft YaHei"/>
               </a:rPr>
-              <a:t>其 MLLM API 输出在高负载下解析失败（运行至第 223 条即中止）</a:t>
+              <a:t>⇒ 失败是 </a:t>
+            </a:r>
+            <a:r>
+              <a:rPr sz="1700" b="1">
+                <a:solidFill>
+                  <a:srgbClr val="1E1E1E"/>
+                </a:solidFill>
+                <a:latin typeface="Microsoft YaHei"/>
+                <a:ea typeface="Microsoft YaHei"/>
+              </a:rPr>
+              <a:t>localization</a:t>
+            </a:r>
+            <a:r>
+              <a:rPr sz="1700" b="0">
+                <a:solidFill>
+                  <a:srgbClr val="1E1E1E"/>
+                </a:solidFill>
+                <a:latin typeface="Microsoft YaHei"/>
+                <a:ea typeface="Microsoft YaHei"/>
+              </a:rPr>
+              <a:t>（不知道在哪），不是 representation</a:t>
             </a:r>
           </a:p>
         </p:txBody>
@@ -4274,281 +3985,35 @@
                 <a:latin typeface="Microsoft YaHei"/>
                 <a:ea typeface="Microsoft YaHei"/>
               </a:rPr>
-              <a:t>诊断二：瓶颈是 selection，不是 mask 质量</a:t>
-            </a:r>
-          </a:p>
-        </p:txBody>
-      </p:sp>
-      <p:sp>
-        <p:nvSpPr>
-          <p:cNvPr id="3" name="TextBox 2"/>
-          <p:cNvSpPr txBox="1"/>
+              <a:t>方法框图</a:t>
+            </a:r>
+          </a:p>
+        </p:txBody>
+      </p:sp>
+      <p:pic>
+        <p:nvPicPr>
+          <p:cNvPr id="3" name="Picture 2" descr="method_diagram.png"/>
+          <p:cNvPicPr>
+            <a:picLocks noChangeAspect="1"/>
+          </p:cNvPicPr>
           <p:nvPr/>
-        </p:nvSpPr>
-        <p:spPr>
-          <a:xfrm>
-            <a:off x="777240" y="1417320"/>
-            <a:ext cx="10607040" cy="822960"/>
+        </p:nvPicPr>
+        <p:blipFill>
+          <a:blip r:embed="rId2"/>
+          <a:stretch>
+            <a:fillRect/>
+          </a:stretch>
+        </p:blipFill>
+        <p:spPr>
+          <a:xfrm>
+            <a:off x="411480" y="1325880"/>
+            <a:ext cx="11384280" cy="4838319"/>
           </a:xfrm>
           <a:prstGeom prst="rect">
             <a:avLst/>
           </a:prstGeom>
-          <a:noFill/>
-        </p:spPr>
-        <p:txBody>
-          <a:bodyPr wrap="square">
-            <a:spAutoFit/>
-          </a:bodyPr>
-          <a:lstStyle/>
-          <a:p>
-            <a:r>
-              <a:rPr sz="1700" b="1">
-                <a:solidFill>
-                  <a:srgbClr val="2563EB"/>
-                </a:solidFill>
-                <a:latin typeface="Microsoft YaHei"/>
-                <a:ea typeface="Microsoft YaHei"/>
-              </a:rPr>
-              <a:t>●  </a:t>
-            </a:r>
-            <a:r>
-              <a:rPr sz="1700" b="0">
-                <a:solidFill>
-                  <a:srgbClr val="1E1E1E"/>
-                </a:solidFill>
-                <a:latin typeface="Microsoft YaHei"/>
-                <a:ea typeface="Microsoft YaHei"/>
-              </a:rPr>
-              <a:t>oracle：池中最好 mask 达 </a:t>
-            </a:r>
-            <a:r>
-              <a:rPr sz="1700" b="1">
-                <a:solidFill>
-                  <a:srgbClr val="1E1E1E"/>
-                </a:solidFill>
-                <a:latin typeface="Microsoft YaHei"/>
-                <a:ea typeface="Microsoft YaHei"/>
-              </a:rPr>
-              <a:t>82.21 mIoU</a:t>
-            </a:r>
-            <a:r>
-              <a:rPr sz="1700" b="0">
-                <a:solidFill>
-                  <a:srgbClr val="1E1E1E"/>
-                </a:solidFill>
-                <a:latin typeface="Microsoft YaHei"/>
-                <a:ea typeface="Microsoft YaHei"/>
-              </a:rPr>
-              <a:t>（82% 表达式池里已有好 mask）；所基于的 HybridGL released pipeline 只拿到 </a:t>
-            </a:r>
-            <a:r>
-              <a:rPr sz="1700" b="1">
-                <a:solidFill>
-                  <a:srgbClr val="1E1E1E"/>
-                </a:solidFill>
-                <a:latin typeface="Microsoft YaHei"/>
-                <a:ea typeface="Microsoft YaHei"/>
-              </a:rPr>
-              <a:t>44.82</a:t>
-            </a:r>
-          </a:p>
-        </p:txBody>
-      </p:sp>
-      <p:sp>
-        <p:nvSpPr>
-          <p:cNvPr id="4" name="TextBox 3"/>
-          <p:cNvSpPr txBox="1"/>
-          <p:nvPr/>
-        </p:nvSpPr>
-        <p:spPr>
-          <a:xfrm>
-            <a:off x="777240" y="2377440"/>
-            <a:ext cx="10607040" cy="822960"/>
-          </a:xfrm>
-          <a:prstGeom prst="rect">
-            <a:avLst/>
-          </a:prstGeom>
-          <a:noFill/>
-        </p:spPr>
-        <p:txBody>
-          <a:bodyPr wrap="square">
-            <a:spAutoFit/>
-          </a:bodyPr>
-          <a:lstStyle/>
-          <a:p>
-            <a:r>
-              <a:rPr sz="1700" b="1">
-                <a:solidFill>
-                  <a:srgbClr val="2563EB"/>
-                </a:solidFill>
-                <a:latin typeface="Microsoft YaHei"/>
-                <a:ea typeface="Microsoft YaHei"/>
-              </a:rPr>
-              <a:t>●  </a:t>
-            </a:r>
-            <a:r>
-              <a:rPr sz="1700" b="0">
-                <a:solidFill>
-                  <a:srgbClr val="1E1E1E"/>
-                </a:solidFill>
-                <a:latin typeface="Microsoft YaHei"/>
-                <a:ea typeface="Microsoft YaHei"/>
-              </a:rPr>
-              <a:t>可回收 IoU 的构成：</a:t>
-            </a:r>
-            <a:r>
-              <a:rPr sz="1700" b="1">
-                <a:solidFill>
-                  <a:srgbClr val="1E1E1E"/>
-                </a:solidFill>
-                <a:latin typeface="Microsoft YaHei"/>
-                <a:ea typeface="Microsoft YaHei"/>
-              </a:rPr>
-              <a:t>wrong-instance（选错实例）主导</a:t>
-            </a:r>
-            <a:r>
-              <a:rPr sz="1700" b="0">
-                <a:solidFill>
-                  <a:srgbClr val="1E1E1E"/>
-                </a:solidFill>
-                <a:latin typeface="Microsoft YaHei"/>
-                <a:ea typeface="Microsoft YaHei"/>
-              </a:rPr>
-              <a:t>；under-segmentation 只占小头——现有工作多聚焦 mask 质量与合并</a:t>
-            </a:r>
-          </a:p>
-        </p:txBody>
-      </p:sp>
-      <p:sp>
-        <p:nvSpPr>
-          <p:cNvPr id="5" name="TextBox 4"/>
-          <p:cNvSpPr txBox="1"/>
-          <p:nvPr/>
-        </p:nvSpPr>
-        <p:spPr>
-          <a:xfrm>
-            <a:off x="777240" y="3337560"/>
-            <a:ext cx="10607040" cy="822960"/>
-          </a:xfrm>
-          <a:prstGeom prst="rect">
-            <a:avLst/>
-          </a:prstGeom>
-          <a:noFill/>
-        </p:spPr>
-        <p:txBody>
-          <a:bodyPr wrap="square">
-            <a:spAutoFit/>
-          </a:bodyPr>
-          <a:lstStyle/>
-          <a:p>
-            <a:r>
-              <a:rPr sz="1700" b="1">
-                <a:solidFill>
-                  <a:srgbClr val="2563EB"/>
-                </a:solidFill>
-                <a:latin typeface="Microsoft YaHei"/>
-                <a:ea typeface="Microsoft YaHei"/>
-              </a:rPr>
-              <a:t>●  </a:t>
-            </a:r>
-            <a:r>
-              <a:rPr sz="1700" b="0">
-                <a:solidFill>
-                  <a:srgbClr val="1E1E1E"/>
-                </a:solidFill>
-                <a:latin typeface="Microsoft YaHei"/>
-                <a:ea typeface="Microsoft YaHei"/>
-              </a:rPr>
-              <a:t>更强 encoder 不解决：SigLIP-so400m 反而</a:t>
-            </a:r>
-            <a:r>
-              <a:rPr sz="1700" b="1">
-                <a:solidFill>
-                  <a:srgbClr val="1E1E1E"/>
-                </a:solidFill>
-                <a:latin typeface="Microsoft YaHei"/>
-                <a:ea typeface="Microsoft YaHei"/>
-              </a:rPr>
-              <a:t>更差</a:t>
-            </a:r>
-            <a:r>
-              <a:rPr sz="1700" b="0">
-                <a:solidFill>
-                  <a:srgbClr val="1E1E1E"/>
-                </a:solidFill>
-                <a:latin typeface="Microsoft YaHei"/>
-                <a:ea typeface="Microsoft YaHei"/>
-              </a:rPr>
-              <a:t>（36.5 vs 40.4）</a:t>
-            </a:r>
-          </a:p>
-        </p:txBody>
-      </p:sp>
-      <p:sp>
-        <p:nvSpPr>
-          <p:cNvPr id="6" name="TextBox 5"/>
-          <p:cNvSpPr txBox="1"/>
-          <p:nvPr/>
-        </p:nvSpPr>
-        <p:spPr>
-          <a:xfrm>
-            <a:off x="777240" y="4297680"/>
-            <a:ext cx="10607040" cy="822960"/>
-          </a:xfrm>
-          <a:prstGeom prst="rect">
-            <a:avLst/>
-          </a:prstGeom>
-          <a:noFill/>
-        </p:spPr>
-        <p:txBody>
-          <a:bodyPr wrap="square">
-            <a:spAutoFit/>
-          </a:bodyPr>
-          <a:lstStyle/>
-          <a:p>
-            <a:r>
-              <a:rPr sz="1700" b="1">
-                <a:solidFill>
-                  <a:srgbClr val="2563EB"/>
-                </a:solidFill>
-                <a:latin typeface="Microsoft YaHei"/>
-                <a:ea typeface="Microsoft YaHei"/>
-              </a:rPr>
-              <a:t>●  </a:t>
-            </a:r>
-            <a:r>
-              <a:rPr sz="1700" b="0">
-                <a:solidFill>
-                  <a:srgbClr val="1E1E1E"/>
-                </a:solidFill>
-                <a:latin typeface="Microsoft YaHei"/>
-                <a:ea typeface="Microsoft YaHei"/>
-              </a:rPr>
-              <a:t>⇒ 失败是 </a:t>
-            </a:r>
-            <a:r>
-              <a:rPr sz="1700" b="1">
-                <a:solidFill>
-                  <a:srgbClr val="1E1E1E"/>
-                </a:solidFill>
-                <a:latin typeface="Microsoft YaHei"/>
-                <a:ea typeface="Microsoft YaHei"/>
-              </a:rPr>
-              <a:t>localization</a:t>
-            </a:r>
-            <a:r>
-              <a:rPr sz="1700" b="0">
-                <a:solidFill>
-                  <a:srgbClr val="1E1E1E"/>
-                </a:solidFill>
-                <a:latin typeface="Microsoft YaHei"/>
-                <a:ea typeface="Microsoft YaHei"/>
-              </a:rPr>
-              <a:t>（不知道在哪），不是 representation</a:t>
-            </a:r>
-          </a:p>
-        </p:txBody>
-      </p:sp>
+        </p:spPr>
+      </p:pic>
     </p:spTree>
   </p:cSld>
   <p:clrMapOvr>
@@ -4602,35 +4067,271 @@
                 <a:latin typeface="Microsoft YaHei"/>
                 <a:ea typeface="Microsoft YaHei"/>
               </a:rPr>
-              <a:t>方法框图</a:t>
-            </a:r>
-          </a:p>
-        </p:txBody>
-      </p:sp>
-      <p:pic>
-        <p:nvPicPr>
-          <p:cNvPr id="3" name="Picture 2" descr="method_diagram.png"/>
-          <p:cNvPicPr>
-            <a:picLocks noChangeAspect="1"/>
-          </p:cNvPicPr>
+              <a:t>创新点 1：全句 box 先验协议</a:t>
+            </a:r>
+          </a:p>
+        </p:txBody>
+      </p:sp>
+      <p:sp>
+        <p:nvSpPr>
+          <p:cNvPr id="3" name="TextBox 2"/>
+          <p:cNvSpPr txBox="1"/>
           <p:nvPr/>
-        </p:nvPicPr>
-        <p:blipFill>
-          <a:blip r:embed="rId2"/>
-          <a:stretch>
-            <a:fillRect/>
-          </a:stretch>
-        </p:blipFill>
-        <p:spPr>
-          <a:xfrm>
-            <a:off x="411480" y="1325880"/>
-            <a:ext cx="11384280" cy="4838319"/>
+        </p:nvSpPr>
+        <p:spPr>
+          <a:xfrm>
+            <a:off x="777240" y="1417320"/>
+            <a:ext cx="10607040" cy="822960"/>
           </a:xfrm>
           <a:prstGeom prst="rect">
             <a:avLst/>
           </a:prstGeom>
-        </p:spPr>
-      </p:pic>
+          <a:noFill/>
+        </p:spPr>
+        <p:txBody>
+          <a:bodyPr wrap="square">
+            <a:spAutoFit/>
+          </a:bodyPr>
+          <a:lstStyle/>
+          <a:p>
+            <a:r>
+              <a:rPr sz="1700" b="1">
+                <a:solidFill>
+                  <a:srgbClr val="2563EB"/>
+                </a:solidFill>
+                <a:latin typeface="Microsoft YaHei"/>
+                <a:ea typeface="Microsoft YaHei"/>
+              </a:rPr>
+              <a:t>●  </a:t>
+            </a:r>
+            <a:r>
+              <a:rPr sz="1700" b="0">
+                <a:solidFill>
+                  <a:srgbClr val="1E1E1E"/>
+                </a:solidFill>
+                <a:latin typeface="Microsoft YaHei"/>
+                <a:ea typeface="Microsoft YaHei"/>
+              </a:rPr>
+              <a:t>冻结 7B VLM（LLaVA-OneVision-7B），自然语言直接问 box；</a:t>
+            </a:r>
+            <a:r>
+              <a:rPr sz="1700" b="1">
+                <a:solidFill>
+                  <a:srgbClr val="1E1E1E"/>
+                </a:solidFill>
+                <a:latin typeface="Microsoft YaHei"/>
+                <a:ea typeface="Microsoft YaHei"/>
+              </a:rPr>
+              <a:t>传全句 ≠ 名词短语</a:t>
+            </a:r>
+            <a:r>
+              <a:rPr sz="1700" b="0">
+                <a:solidFill>
+                  <a:srgbClr val="1E1E1E"/>
+                </a:solidFill>
+                <a:latin typeface="Microsoft YaHei"/>
+                <a:ea typeface="Microsoft YaHei"/>
+              </a:rPr>
+              <a:t>：</a:t>
+            </a:r>
+            <a:r>
+              <a:rPr sz="1700" b="1">
+                <a:solidFill>
+                  <a:srgbClr val="1E1E1E"/>
+                </a:solidFill>
+                <a:latin typeface="Microsoft YaHei"/>
+                <a:ea typeface="Microsoft YaHei"/>
+              </a:rPr>
+              <a:t>+13.4 / +10.6 / +11.6</a:t>
+            </a:r>
+            <a:r>
+              <a:rPr sz="1700" b="0">
+                <a:solidFill>
+                  <a:srgbClr val="1E1E1E"/>
+                </a:solidFill>
+                <a:latin typeface="Microsoft YaHei"/>
+                <a:ea typeface="Microsoft YaHei"/>
+              </a:rPr>
+              <a:t> mIoU</a:t>
+            </a:r>
+          </a:p>
+        </p:txBody>
+      </p:sp>
+      <p:sp>
+        <p:nvSpPr>
+          <p:cNvPr id="4" name="TextBox 3"/>
+          <p:cNvSpPr txBox="1"/>
+          <p:nvPr/>
+        </p:nvSpPr>
+        <p:spPr>
+          <a:xfrm>
+            <a:off x="777240" y="2377440"/>
+            <a:ext cx="10607040" cy="822960"/>
+          </a:xfrm>
+          <a:prstGeom prst="rect">
+            <a:avLst/>
+          </a:prstGeom>
+          <a:noFill/>
+        </p:spPr>
+        <p:txBody>
+          <a:bodyPr wrap="square">
+            <a:spAutoFit/>
+          </a:bodyPr>
+          <a:lstStyle/>
+          <a:p>
+            <a:r>
+              <a:rPr sz="1700" b="1">
+                <a:solidFill>
+                  <a:srgbClr val="2563EB"/>
+                </a:solidFill>
+                <a:latin typeface="Microsoft YaHei"/>
+                <a:ea typeface="Microsoft YaHei"/>
+              </a:rPr>
+              <a:t>●  </a:t>
+            </a:r>
+            <a:r>
+              <a:rPr sz="1700" b="0">
+                <a:solidFill>
+                  <a:srgbClr val="1E1E1E"/>
+                </a:solidFill>
+                <a:latin typeface="Microsoft YaHei"/>
+                <a:ea typeface="Microsoft YaHei"/>
+              </a:rPr>
+              <a:t>box 用作</a:t>
+            </a:r>
+            <a:r>
+              <a:rPr sz="1700" b="1">
+                <a:solidFill>
+                  <a:srgbClr val="1E1E1E"/>
+                </a:solidFill>
+                <a:latin typeface="Microsoft YaHei"/>
+                <a:ea typeface="Microsoft YaHei"/>
+              </a:rPr>
+              <a:t>选择器</a:t>
+            </a:r>
+            <a:r>
+              <a:rPr sz="1700" b="0">
+                <a:solidFill>
+                  <a:srgbClr val="1E1E1E"/>
+                </a:solidFill>
+                <a:latin typeface="Microsoft YaHei"/>
+                <a:ea typeface="Microsoft YaHei"/>
+              </a:rPr>
+              <a:t>，不重新生成 mask（诊断显示池子已经够好）</a:t>
+            </a:r>
+          </a:p>
+        </p:txBody>
+      </p:sp>
+      <p:sp>
+        <p:nvSpPr>
+          <p:cNvPr id="5" name="TextBox 4"/>
+          <p:cNvSpPr txBox="1"/>
+          <p:nvPr/>
+        </p:nvSpPr>
+        <p:spPr>
+          <a:xfrm>
+            <a:off x="777240" y="3337560"/>
+            <a:ext cx="10607040" cy="822960"/>
+          </a:xfrm>
+          <a:prstGeom prst="rect">
+            <a:avLst/>
+          </a:prstGeom>
+          <a:noFill/>
+        </p:spPr>
+        <p:txBody>
+          <a:bodyPr wrap="square">
+            <a:spAutoFit/>
+          </a:bodyPr>
+          <a:lstStyle/>
+          <a:p>
+            <a:r>
+              <a:rPr sz="1700" b="1">
+                <a:solidFill>
+                  <a:srgbClr val="2563EB"/>
+                </a:solidFill>
+                <a:latin typeface="Microsoft YaHei"/>
+                <a:ea typeface="Microsoft YaHei"/>
+              </a:rPr>
+              <a:t>●  </a:t>
+            </a:r>
+            <a:r>
+              <a:rPr sz="1700" b="0">
+                <a:solidFill>
+                  <a:srgbClr val="1E1E1E"/>
+                </a:solidFill>
+                <a:latin typeface="Microsoft YaHei"/>
+                <a:ea typeface="Microsoft YaHei"/>
+              </a:rPr>
+              <a:t>无目标判定：三 prompt presence 集成 → N-acc </a:t>
+            </a:r>
+            <a:r>
+              <a:rPr sz="1700" b="1">
+                <a:solidFill>
+                  <a:srgbClr val="1E1E1E"/>
+                </a:solidFill>
+                <a:latin typeface="Microsoft YaHei"/>
+                <a:ea typeface="Microsoft YaHei"/>
+              </a:rPr>
+              <a:t>86.14</a:t>
+            </a:r>
+            <a:r>
+              <a:rPr sz="1700" b="0">
+                <a:solidFill>
+                  <a:srgbClr val="1E1E1E"/>
+                </a:solidFill>
+                <a:latin typeface="Microsoft YaHei"/>
+                <a:ea typeface="Microsoft YaHei"/>
+              </a:rPr>
+              <a:t>（高于已发表全监督 SOTA）</a:t>
+            </a:r>
+          </a:p>
+        </p:txBody>
+      </p:sp>
+      <p:sp>
+        <p:nvSpPr>
+          <p:cNvPr id="6" name="TextBox 5"/>
+          <p:cNvSpPr txBox="1"/>
+          <p:nvPr/>
+        </p:nvSpPr>
+        <p:spPr>
+          <a:xfrm>
+            <a:off x="777240" y="4297680"/>
+            <a:ext cx="10607040" cy="822960"/>
+          </a:xfrm>
+          <a:prstGeom prst="rect">
+            <a:avLst/>
+          </a:prstGeom>
+          <a:noFill/>
+        </p:spPr>
+        <p:txBody>
+          <a:bodyPr wrap="square">
+            <a:spAutoFit/>
+          </a:bodyPr>
+          <a:lstStyle/>
+          <a:p>
+            <a:r>
+              <a:rPr sz="1700" b="1">
+                <a:solidFill>
+                  <a:srgbClr val="2563EB"/>
+                </a:solidFill>
+                <a:latin typeface="Microsoft YaHei"/>
+                <a:ea typeface="Microsoft YaHei"/>
+              </a:rPr>
+              <a:t>●  </a:t>
+            </a:r>
+            <a:r>
+              <a:rPr sz="1700" b="0">
+                <a:solidFill>
+                  <a:srgbClr val="1E1E1E"/>
+                </a:solidFill>
+                <a:latin typeface="Microsoft YaHei"/>
+                <a:ea typeface="Microsoft YaHei"/>
+              </a:rPr>
+              <a:t>试过并淘汰的替代（同记录 mIoU，基线 42.9）：Set-of-Mark 索引 39.1 / 删除法 42.7 / 排除法 41.0 / 网格投票 11.1</a:t>
+            </a:r>
+          </a:p>
+        </p:txBody>
+      </p:sp>
     </p:spTree>
   </p:cSld>
   <p:clrMapOvr>
@@ -4684,7 +4385,7 @@
                 <a:latin typeface="Microsoft YaHei"/>
                 <a:ea typeface="Microsoft YaHei"/>
               </a:rPr>
-              <a:t>创新点 1：全句 box 先验协议</a:t>
+              <a:t>创新点 2：自研选择头上位（组件来源审计）</a:t>
             </a:r>
           </a:p>
         </p:txBody>
@@ -4729,7 +4430,7 @@
                 <a:latin typeface="Microsoft YaHei"/>
                 <a:ea typeface="Microsoft YaHei"/>
               </a:rPr>
-              <a:t>冻结 7B VLM（LLaVA-OneVision-7B），自然语言直接问 box；</a:t>
+              <a:t>逐组件标注来源（本工作 / released / 通用冻结），把 released 计分项</a:t>
             </a:r>
             <a:r>
               <a:rPr sz="1700" b="1">
@@ -4739,7 +4440,7 @@
                 <a:latin typeface="Microsoft YaHei"/>
                 <a:ea typeface="Microsoft YaHei"/>
               </a:rPr>
-              <a:t>传全句 ≠ 名词短语</a:t>
+              <a:t>全部移出</a:t>
             </a:r>
             <a:r>
               <a:rPr sz="1700" b="0">
@@ -4749,27 +4450,7 @@
                 <a:latin typeface="Microsoft YaHei"/>
                 <a:ea typeface="Microsoft YaHei"/>
               </a:rPr>
-              <a:t>：</a:t>
-            </a:r>
-            <a:r>
-              <a:rPr sz="1700" b="1">
-                <a:solidFill>
-                  <a:srgbClr val="1E1E1E"/>
-                </a:solidFill>
-                <a:latin typeface="Microsoft YaHei"/>
-                <a:ea typeface="Microsoft YaHei"/>
-              </a:rPr>
-              <a:t>+13.4 / +10.6 / +11.6</a:t>
-            </a:r>
-            <a:r>
-              <a:rPr sz="1700" b="0">
-                <a:solidFill>
-                  <a:srgbClr val="1E1E1E"/>
-                </a:solidFill>
-                <a:latin typeface="Microsoft YaHei"/>
-                <a:ea typeface="Microsoft YaHei"/>
-              </a:rPr>
-              <a:t> mIoU</a:t>
+              <a:t>最终选择头</a:t>
             </a:r>
           </a:p>
         </p:txBody>
@@ -4814,7 +4495,7 @@
                 <a:latin typeface="Microsoft YaHei"/>
                 <a:ea typeface="Microsoft YaHei"/>
               </a:rPr>
-              <a:t>box 用作</a:t>
+              <a:t>自研 learned selector（8 项自有特征，仅 train 划分拟合，declared trained）：</a:t>
             </a:r>
             <a:r>
               <a:rPr sz="1700" b="1">
@@ -4824,7 +4505,7 @@
                 <a:latin typeface="Microsoft YaHei"/>
                 <a:ea typeface="Microsoft YaHei"/>
               </a:rPr>
-              <a:t>选择器</a:t>
+              <a:t>70.57 / 66.35 / 65.51</a:t>
             </a:r>
             <a:r>
               <a:rPr sz="1700" b="0">
@@ -4834,7 +4515,7 @@
                 <a:latin typeface="Microsoft YaHei"/>
                 <a:ea typeface="Microsoft YaHei"/>
               </a:rPr>
-              <a:t>，不重新生成 mask（诊断显示池子已经够好）</a:t>
+              <a:t>（原免训练版 68.53 / 64.67 / 65.12，保留为 zero-shot 参考行）</a:t>
             </a:r>
           </a:p>
         </p:txBody>
@@ -4879,7 +4560,7 @@
                 <a:latin typeface="Microsoft YaHei"/>
                 <a:ea typeface="Microsoft YaHei"/>
               </a:rPr>
-              <a:t>无目标判定：三 prompt presence 集成 → N-acc </a:t>
+              <a:t>五个 test 列同步提升；仍读取的 released 组件只剩 2 个</a:t>
             </a:r>
             <a:r>
               <a:rPr sz="1700" b="1">
@@ -4889,17 +4570,7 @@
                 <a:latin typeface="Microsoft YaHei"/>
                 <a:ea typeface="Microsoft YaHei"/>
               </a:rPr>
-              <a:t>86.14</a:t>
-            </a:r>
-            <a:r>
-              <a:rPr sz="1700" b="0">
-                <a:solidFill>
-                  <a:srgbClr val="1E1E1E"/>
-                </a:solidFill>
-                <a:latin typeface="Microsoft YaHei"/>
-                <a:ea typeface="Microsoft YaHei"/>
-              </a:rPr>
-              <a:t>（高于已发表全监督 SOTA）</a:t>
+              <a:t>冻结表示</a:t>
             </a:r>
           </a:p>
         </p:txBody>
@@ -4944,7 +4615,17 @@
                 <a:latin typeface="Microsoft YaHei"/>
                 <a:ea typeface="Microsoft YaHei"/>
               </a:rPr>
-              <a:t>试过并淘汰的替代（同记录 mIoU，基线 42.9）：Set-of-Mark 索引 39.1 / 删除法 42.7 / 排除法 41.0 / 网格投票 11.1</a:t>
+              <a:t>跨家族 review：</a:t>
+            </a:r>
+            <a:r>
+              <a:rPr sz="1700" b="1">
+                <a:solidFill>
+                  <a:srgbClr val="1E1E1E"/>
+                </a:solidFill>
+                <a:latin typeface="Microsoft YaHei"/>
+                <a:ea typeface="Microsoft YaHei"/>
+              </a:rPr>
+              <a:t>ACCEPT 9/10</a:t>
             </a:r>
           </a:p>
         </p:txBody>
@@ -4958,304 +4639,6 @@
 </file>
 
 <file path=ppt/slides/slide7.xml><?xml version="1.0" encoding="utf-8"?>
-<p:sld xmlns:a="http://schemas.openxmlformats.org/drawingml/2006/main" xmlns:p="http://schemas.openxmlformats.org/presentationml/2006/main" xmlns:r="http://schemas.openxmlformats.org/officeDocument/2006/relationships">
-  <p:cSld>
-    <p:spTree>
-      <p:nvGrpSpPr>
-        <p:cNvPr id="1" name=""/>
-        <p:cNvGrpSpPr/>
-        <p:nvPr/>
-      </p:nvGrpSpPr>
-      <p:grpSpPr/>
-      <p:sp>
-        <p:nvSpPr>
-          <p:cNvPr id="2" name="TextBox 1"/>
-          <p:cNvSpPr txBox="1"/>
-          <p:nvPr/>
-        </p:nvSpPr>
-        <p:spPr>
-          <a:xfrm>
-            <a:off x="502920" y="274320"/>
-            <a:ext cx="11155680" cy="731520"/>
-          </a:xfrm>
-          <a:prstGeom prst="rect">
-            <a:avLst/>
-          </a:prstGeom>
-          <a:noFill/>
-        </p:spPr>
-        <p:txBody>
-          <a:bodyPr wrap="square" anchor="t">
-            <a:spAutoFit/>
-          </a:bodyPr>
-          <a:lstStyle/>
-          <a:p>
-            <a:pPr algn="l">
-              <a:spcAft>
-                <a:spcPts val="0"/>
-              </a:spcAft>
-            </a:pPr>
-            <a:r>
-              <a:rPr sz="2600" b="1">
-                <a:solidFill>
-                  <a:srgbClr val="2563EB"/>
-                </a:solidFill>
-                <a:latin typeface="Microsoft YaHei"/>
-                <a:ea typeface="Microsoft YaHei"/>
-              </a:rPr>
-              <a:t>创新点 2：自研选择头上位（组件来源审计）</a:t>
-            </a:r>
-          </a:p>
-        </p:txBody>
-      </p:sp>
-      <p:sp>
-        <p:nvSpPr>
-          <p:cNvPr id="3" name="TextBox 2"/>
-          <p:cNvSpPr txBox="1"/>
-          <p:nvPr/>
-        </p:nvSpPr>
-        <p:spPr>
-          <a:xfrm>
-            <a:off x="777240" y="1417320"/>
-            <a:ext cx="10607040" cy="822960"/>
-          </a:xfrm>
-          <a:prstGeom prst="rect">
-            <a:avLst/>
-          </a:prstGeom>
-          <a:noFill/>
-        </p:spPr>
-        <p:txBody>
-          <a:bodyPr wrap="square">
-            <a:spAutoFit/>
-          </a:bodyPr>
-          <a:lstStyle/>
-          <a:p>
-            <a:r>
-              <a:rPr sz="1700" b="1">
-                <a:solidFill>
-                  <a:srgbClr val="2563EB"/>
-                </a:solidFill>
-                <a:latin typeface="Microsoft YaHei"/>
-                <a:ea typeface="Microsoft YaHei"/>
-              </a:rPr>
-              <a:t>●  </a:t>
-            </a:r>
-            <a:r>
-              <a:rPr sz="1700" b="0">
-                <a:solidFill>
-                  <a:srgbClr val="1E1E1E"/>
-                </a:solidFill>
-                <a:latin typeface="Microsoft YaHei"/>
-                <a:ea typeface="Microsoft YaHei"/>
-              </a:rPr>
-              <a:t>逐组件标注来源（本工作 / released / 通用冻结），把 released 计分项</a:t>
-            </a:r>
-            <a:r>
-              <a:rPr sz="1700" b="1">
-                <a:solidFill>
-                  <a:srgbClr val="1E1E1E"/>
-                </a:solidFill>
-                <a:latin typeface="Microsoft YaHei"/>
-                <a:ea typeface="Microsoft YaHei"/>
-              </a:rPr>
-              <a:t>全部移出</a:t>
-            </a:r>
-            <a:r>
-              <a:rPr sz="1700" b="0">
-                <a:solidFill>
-                  <a:srgbClr val="1E1E1E"/>
-                </a:solidFill>
-                <a:latin typeface="Microsoft YaHei"/>
-                <a:ea typeface="Microsoft YaHei"/>
-              </a:rPr>
-              <a:t>最终选择头</a:t>
-            </a:r>
-          </a:p>
-        </p:txBody>
-      </p:sp>
-      <p:sp>
-        <p:nvSpPr>
-          <p:cNvPr id="4" name="TextBox 3"/>
-          <p:cNvSpPr txBox="1"/>
-          <p:nvPr/>
-        </p:nvSpPr>
-        <p:spPr>
-          <a:xfrm>
-            <a:off x="777240" y="2377440"/>
-            <a:ext cx="10607040" cy="822960"/>
-          </a:xfrm>
-          <a:prstGeom prst="rect">
-            <a:avLst/>
-          </a:prstGeom>
-          <a:noFill/>
-        </p:spPr>
-        <p:txBody>
-          <a:bodyPr wrap="square">
-            <a:spAutoFit/>
-          </a:bodyPr>
-          <a:lstStyle/>
-          <a:p>
-            <a:r>
-              <a:rPr sz="1700" b="1">
-                <a:solidFill>
-                  <a:srgbClr val="2563EB"/>
-                </a:solidFill>
-                <a:latin typeface="Microsoft YaHei"/>
-                <a:ea typeface="Microsoft YaHei"/>
-              </a:rPr>
-              <a:t>●  </a:t>
-            </a:r>
-            <a:r>
-              <a:rPr sz="1700" b="0">
-                <a:solidFill>
-                  <a:srgbClr val="1E1E1E"/>
-                </a:solidFill>
-                <a:latin typeface="Microsoft YaHei"/>
-                <a:ea typeface="Microsoft YaHei"/>
-              </a:rPr>
-              <a:t>自研 learned selector（8 项自有特征，仅 train 划分拟合，declared trained）：</a:t>
-            </a:r>
-            <a:r>
-              <a:rPr sz="1700" b="1">
-                <a:solidFill>
-                  <a:srgbClr val="1E1E1E"/>
-                </a:solidFill>
-                <a:latin typeface="Microsoft YaHei"/>
-                <a:ea typeface="Microsoft YaHei"/>
-              </a:rPr>
-              <a:t>70.57 / 66.35 / 65.51</a:t>
-            </a:r>
-            <a:r>
-              <a:rPr sz="1700" b="0">
-                <a:solidFill>
-                  <a:srgbClr val="1E1E1E"/>
-                </a:solidFill>
-                <a:latin typeface="Microsoft YaHei"/>
-                <a:ea typeface="Microsoft YaHei"/>
-              </a:rPr>
-              <a:t>（原免训练版 68.53 / 64.67 / 65.12，保留为 zero-shot 参考行）</a:t>
-            </a:r>
-          </a:p>
-        </p:txBody>
-      </p:sp>
-      <p:sp>
-        <p:nvSpPr>
-          <p:cNvPr id="5" name="TextBox 4"/>
-          <p:cNvSpPr txBox="1"/>
-          <p:nvPr/>
-        </p:nvSpPr>
-        <p:spPr>
-          <a:xfrm>
-            <a:off x="777240" y="3337560"/>
-            <a:ext cx="10607040" cy="822960"/>
-          </a:xfrm>
-          <a:prstGeom prst="rect">
-            <a:avLst/>
-          </a:prstGeom>
-          <a:noFill/>
-        </p:spPr>
-        <p:txBody>
-          <a:bodyPr wrap="square">
-            <a:spAutoFit/>
-          </a:bodyPr>
-          <a:lstStyle/>
-          <a:p>
-            <a:r>
-              <a:rPr sz="1700" b="1">
-                <a:solidFill>
-                  <a:srgbClr val="2563EB"/>
-                </a:solidFill>
-                <a:latin typeface="Microsoft YaHei"/>
-                <a:ea typeface="Microsoft YaHei"/>
-              </a:rPr>
-              <a:t>●  </a:t>
-            </a:r>
-            <a:r>
-              <a:rPr sz="1700" b="0">
-                <a:solidFill>
-                  <a:srgbClr val="1E1E1E"/>
-                </a:solidFill>
-                <a:latin typeface="Microsoft YaHei"/>
-                <a:ea typeface="Microsoft YaHei"/>
-              </a:rPr>
-              <a:t>五个 test 列同步提升；仍读取的 released 组件只剩 2 个</a:t>
-            </a:r>
-            <a:r>
-              <a:rPr sz="1700" b="1">
-                <a:solidFill>
-                  <a:srgbClr val="1E1E1E"/>
-                </a:solidFill>
-                <a:latin typeface="Microsoft YaHei"/>
-                <a:ea typeface="Microsoft YaHei"/>
-              </a:rPr>
-              <a:t>冻结表示</a:t>
-            </a:r>
-          </a:p>
-        </p:txBody>
-      </p:sp>
-      <p:sp>
-        <p:nvSpPr>
-          <p:cNvPr id="6" name="TextBox 5"/>
-          <p:cNvSpPr txBox="1"/>
-          <p:nvPr/>
-        </p:nvSpPr>
-        <p:spPr>
-          <a:xfrm>
-            <a:off x="777240" y="4297680"/>
-            <a:ext cx="10607040" cy="822960"/>
-          </a:xfrm>
-          <a:prstGeom prst="rect">
-            <a:avLst/>
-          </a:prstGeom>
-          <a:noFill/>
-        </p:spPr>
-        <p:txBody>
-          <a:bodyPr wrap="square">
-            <a:spAutoFit/>
-          </a:bodyPr>
-          <a:lstStyle/>
-          <a:p>
-            <a:r>
-              <a:rPr sz="1700" b="1">
-                <a:solidFill>
-                  <a:srgbClr val="2563EB"/>
-                </a:solidFill>
-                <a:latin typeface="Microsoft YaHei"/>
-                <a:ea typeface="Microsoft YaHei"/>
-              </a:rPr>
-              <a:t>●  </a:t>
-            </a:r>
-            <a:r>
-              <a:rPr sz="1700" b="0">
-                <a:solidFill>
-                  <a:srgbClr val="1E1E1E"/>
-                </a:solidFill>
-                <a:latin typeface="Microsoft YaHei"/>
-                <a:ea typeface="Microsoft YaHei"/>
-              </a:rPr>
-              <a:t>跨家族 review：</a:t>
-            </a:r>
-            <a:r>
-              <a:rPr sz="1700" b="1">
-                <a:solidFill>
-                  <a:srgbClr val="1E1E1E"/>
-                </a:solidFill>
-                <a:latin typeface="Microsoft YaHei"/>
-                <a:ea typeface="Microsoft YaHei"/>
-              </a:rPr>
-              <a:t>ACCEPT 9/10</a:t>
-            </a:r>
-          </a:p>
-        </p:txBody>
-      </p:sp>
-    </p:spTree>
-  </p:cSld>
-  <p:clrMapOvr>
-    <a:masterClrMapping/>
-  </p:clrMapOvr>
-</p:sld>
-</file>
-
-<file path=ppt/slides/slide8.xml><?xml version="1.0" encoding="utf-8"?>
 <p:sld xmlns:a="http://schemas.openxmlformats.org/drawingml/2006/main" xmlns:p="http://schemas.openxmlformats.org/presentationml/2006/main" xmlns:r="http://schemas.openxmlformats.org/officeDocument/2006/relationships">
   <p:cSld>
     <p:spTree>
@@ -5785,6 +5168,369 @@
 </p:sld>
 </file>
 
+<file path=ppt/slides/slide8.xml><?xml version="1.0" encoding="utf-8"?>
+<p:sld xmlns:a="http://schemas.openxmlformats.org/drawingml/2006/main" xmlns:p="http://schemas.openxmlformats.org/presentationml/2006/main" xmlns:r="http://schemas.openxmlformats.org/officeDocument/2006/relationships">
+  <p:cSld>
+    <p:spTree>
+      <p:nvGrpSpPr>
+        <p:cNvPr id="1" name=""/>
+        <p:cNvGrpSpPr/>
+        <p:nvPr/>
+      </p:nvGrpSpPr>
+      <p:grpSpPr/>
+      <p:sp>
+        <p:nvSpPr>
+          <p:cNvPr id="2" name="TextBox 1"/>
+          <p:cNvSpPr txBox="1"/>
+          <p:nvPr/>
+        </p:nvSpPr>
+        <p:spPr>
+          <a:xfrm>
+            <a:off x="502920" y="274320"/>
+            <a:ext cx="11155680" cy="731520"/>
+          </a:xfrm>
+          <a:prstGeom prst="rect">
+            <a:avLst/>
+          </a:prstGeom>
+          <a:noFill/>
+        </p:spPr>
+        <p:txBody>
+          <a:bodyPr wrap="square" anchor="t">
+            <a:spAutoFit/>
+          </a:bodyPr>
+          <a:lstStyle/>
+          <a:p>
+            <a:pPr algn="l">
+              <a:spcAft>
+                <a:spcPts val="0"/>
+              </a:spcAft>
+            </a:pPr>
+            <a:r>
+              <a:rPr sz="2600" b="1">
+                <a:solidFill>
+                  <a:srgbClr val="2563EB"/>
+                </a:solidFill>
+                <a:latin typeface="Microsoft YaHei"/>
+                <a:ea typeface="Microsoft YaHei"/>
+              </a:rPr>
+              <a:t>诚实边界与进行中工作</a:t>
+            </a:r>
+          </a:p>
+        </p:txBody>
+      </p:sp>
+      <p:sp>
+        <p:nvSpPr>
+          <p:cNvPr id="3" name="TextBox 2"/>
+          <p:cNvSpPr txBox="1"/>
+          <p:nvPr/>
+        </p:nvSpPr>
+        <p:spPr>
+          <a:xfrm>
+            <a:off x="777240" y="1417320"/>
+            <a:ext cx="10607040" cy="822960"/>
+          </a:xfrm>
+          <a:prstGeom prst="rect">
+            <a:avLst/>
+          </a:prstGeom>
+          <a:noFill/>
+        </p:spPr>
+        <p:txBody>
+          <a:bodyPr wrap="square">
+            <a:spAutoFit/>
+          </a:bodyPr>
+          <a:lstStyle/>
+          <a:p>
+            <a:r>
+              <a:rPr sz="1700" b="1">
+                <a:solidFill>
+                  <a:srgbClr val="2563EB"/>
+                </a:solidFill>
+                <a:latin typeface="Microsoft YaHei"/>
+                <a:ea typeface="Microsoft YaHei"/>
+              </a:rPr>
+              <a:t>●  </a:t>
+            </a:r>
+            <a:r>
+              <a:rPr sz="1700" b="0">
+                <a:solidFill>
+                  <a:srgbClr val="1E1E1E"/>
+                </a:solidFill>
+                <a:latin typeface="Microsoft YaHei"/>
+                <a:ea typeface="Microsoft YaHei"/>
+              </a:rPr>
+              <a:t>全监督 cIoU 仍有差距：52.71 vs 68.94（InstAlign）——已</a:t>
+            </a:r>
+            <a:r>
+              <a:rPr sz="1700" b="1">
+                <a:solidFill>
+                  <a:srgbClr val="1E1E1E"/>
+                </a:solidFill>
+                <a:latin typeface="Microsoft YaHei"/>
+                <a:ea typeface="Microsoft YaHei"/>
+              </a:rPr>
+              <a:t>量化</a:t>
+            </a:r>
+            <a:r>
+              <a:rPr sz="1700" b="0">
+                <a:solidFill>
+                  <a:srgbClr val="1E1E1E"/>
+                </a:solidFill>
+                <a:latin typeface="Microsoft YaHei"/>
+                <a:ea typeface="Microsoft YaHei"/>
+              </a:rPr>
+              <a:t>，不声称</a:t>
+            </a:r>
+          </a:p>
+        </p:txBody>
+      </p:sp>
+      <p:sp>
+        <p:nvSpPr>
+          <p:cNvPr id="4" name="TextBox 3"/>
+          <p:cNvSpPr txBox="1"/>
+          <p:nvPr/>
+        </p:nvSpPr>
+        <p:spPr>
+          <a:xfrm>
+            <a:off x="777240" y="2377440"/>
+            <a:ext cx="10607040" cy="822960"/>
+          </a:xfrm>
+          <a:prstGeom prst="rect">
+            <a:avLst/>
+          </a:prstGeom>
+          <a:noFill/>
+        </p:spPr>
+        <p:txBody>
+          <a:bodyPr wrap="square">
+            <a:spAutoFit/>
+          </a:bodyPr>
+          <a:lstStyle/>
+          <a:p>
+            <a:r>
+              <a:rPr sz="1700" b="1">
+                <a:solidFill>
+                  <a:srgbClr val="2563EB"/>
+                </a:solidFill>
+                <a:latin typeface="Microsoft YaHei"/>
+                <a:ea typeface="Microsoft YaHei"/>
+              </a:rPr>
+              <a:t>●  </a:t>
+            </a:r>
+            <a:r>
+              <a:rPr sz="1700" b="0">
+                <a:solidFill>
+                  <a:srgbClr val="1E1E1E"/>
+                </a:solidFill>
+                <a:latin typeface="Microsoft YaHei"/>
+                <a:ea typeface="Microsoft YaHei"/>
+              </a:rPr>
+              <a:t>对比口径：GLOD-RIS 无公开代码；引用其 </a:t>
+            </a:r>
+            <a:r>
+              <a:rPr sz="1700" b="1">
+                <a:solidFill>
+                  <a:srgbClr val="1E1E1E"/>
+                </a:solidFill>
+                <a:latin typeface="Microsoft YaHei"/>
+                <a:ea typeface="Microsoft YaHei"/>
+              </a:rPr>
+              <a:t>published</a:t>
+            </a:r>
+            <a:r>
+              <a:rPr sz="1700" b="0">
+                <a:solidFill>
+                  <a:srgbClr val="1E1E1E"/>
+                </a:solidFill>
+                <a:latin typeface="Microsoft YaHei"/>
+                <a:ea typeface="Microsoft YaHei"/>
+              </a:rPr>
+              <a:t> 数字做跨环境对比，本地复现与余项在论文附录如实记录（不对其方法作评断）</a:t>
+            </a:r>
+          </a:p>
+        </p:txBody>
+      </p:sp>
+      <p:sp>
+        <p:nvSpPr>
+          <p:cNvPr id="5" name="TextBox 4"/>
+          <p:cNvSpPr txBox="1"/>
+          <p:nvPr/>
+        </p:nvSpPr>
+        <p:spPr>
+          <a:xfrm>
+            <a:off x="777240" y="3337560"/>
+            <a:ext cx="10607040" cy="822960"/>
+          </a:xfrm>
+          <a:prstGeom prst="rect">
+            <a:avLst/>
+          </a:prstGeom>
+          <a:noFill/>
+        </p:spPr>
+        <p:txBody>
+          <a:bodyPr wrap="square">
+            <a:spAutoFit/>
+          </a:bodyPr>
+          <a:lstStyle/>
+          <a:p>
+            <a:r>
+              <a:rPr sz="1700" b="1">
+                <a:solidFill>
+                  <a:srgbClr val="2563EB"/>
+                </a:solidFill>
+                <a:latin typeface="Microsoft YaHei"/>
+                <a:ea typeface="Microsoft YaHei"/>
+              </a:rPr>
+              <a:t>●  </a:t>
+            </a:r>
+            <a:r>
+              <a:rPr sz="1700" b="0">
+                <a:solidFill>
+                  <a:srgbClr val="1E1E1E"/>
+                </a:solidFill>
+                <a:latin typeface="Microsoft YaHei"/>
+                <a:ea typeface="Microsoft YaHei"/>
+              </a:rPr>
+              <a:t>VLM 延迟（0.6~1.8 s/句）已在论文声明</a:t>
+            </a:r>
+          </a:p>
+        </p:txBody>
+      </p:sp>
+      <p:sp>
+        <p:nvSpPr>
+          <p:cNvPr id="6" name="TextBox 5"/>
+          <p:cNvSpPr txBox="1"/>
+          <p:nvPr/>
+        </p:nvSpPr>
+        <p:spPr>
+          <a:xfrm>
+            <a:off x="777240" y="4297680"/>
+            <a:ext cx="10607040" cy="822960"/>
+          </a:xfrm>
+          <a:prstGeom prst="rect">
+            <a:avLst/>
+          </a:prstGeom>
+          <a:noFill/>
+        </p:spPr>
+        <p:txBody>
+          <a:bodyPr wrap="square">
+            <a:spAutoFit/>
+          </a:bodyPr>
+          <a:lstStyle/>
+          <a:p>
+            <a:r>
+              <a:rPr sz="1700" b="1">
+                <a:solidFill>
+                  <a:srgbClr val="2563EB"/>
+                </a:solidFill>
+                <a:latin typeface="Microsoft YaHei"/>
+                <a:ea typeface="Microsoft YaHei"/>
+              </a:rPr>
+              <a:t>●  </a:t>
+            </a:r>
+            <a:r>
+              <a:rPr sz="1700" b="0">
+                <a:solidFill>
+                  <a:srgbClr val="1E1E1E"/>
+                </a:solidFill>
+                <a:latin typeface="Microsoft YaHei"/>
+                <a:ea typeface="Microsoft YaHei"/>
+              </a:rPr>
+              <a:t>进行中：</a:t>
+            </a:r>
+            <a:r>
+              <a:rPr sz="1700" b="1">
+                <a:solidFill>
+                  <a:srgbClr val="1E1E1E"/>
+                </a:solidFill>
+                <a:latin typeface="Microsoft YaHei"/>
+                <a:ea typeface="Microsoft YaHei"/>
+              </a:rPr>
+              <a:t>backbone 削弱实验</a:t>
+            </a:r>
+            <a:r>
+              <a:rPr sz="1700" b="0">
+                <a:solidFill>
+                  <a:srgbClr val="1E1E1E"/>
+                </a:solidFill>
+                <a:latin typeface="Microsoft YaHei"/>
+                <a:ea typeface="Microsoft YaHei"/>
+              </a:rPr>
+              <a:t>——更小的 VLM / 更小的 SAM / 更弱编码器 / 去掉额外检测器</a:t>
+            </a:r>
+          </a:p>
+        </p:txBody>
+      </p:sp>
+      <p:sp>
+        <p:nvSpPr>
+          <p:cNvPr id="7" name="TextBox 6"/>
+          <p:cNvSpPr txBox="1"/>
+          <p:nvPr/>
+        </p:nvSpPr>
+        <p:spPr>
+          <a:xfrm>
+            <a:off x="777240" y="5257800"/>
+            <a:ext cx="10607040" cy="822960"/>
+          </a:xfrm>
+          <a:prstGeom prst="rect">
+            <a:avLst/>
+          </a:prstGeom>
+          <a:noFill/>
+        </p:spPr>
+        <p:txBody>
+          <a:bodyPr wrap="square">
+            <a:spAutoFit/>
+          </a:bodyPr>
+          <a:lstStyle/>
+          <a:p>
+            <a:r>
+              <a:rPr sz="1700" b="1">
+                <a:solidFill>
+                  <a:srgbClr val="2563EB"/>
+                </a:solidFill>
+                <a:latin typeface="Microsoft YaHei"/>
+                <a:ea typeface="Microsoft YaHei"/>
+              </a:rPr>
+              <a:t>●  </a:t>
+            </a:r>
+            <a:r>
+              <a:rPr sz="1700" b="0">
+                <a:solidFill>
+                  <a:srgbClr val="1E1E1E"/>
+                </a:solidFill>
+                <a:latin typeface="Microsoft YaHei"/>
+                <a:ea typeface="Microsoft YaHei"/>
+              </a:rPr>
+              <a:t>目标：</a:t>
+            </a:r>
+            <a:r>
+              <a:rPr sz="1700" b="1">
+                <a:solidFill>
+                  <a:srgbClr val="1E1E1E"/>
+                </a:solidFill>
+                <a:latin typeface="Microsoft YaHei"/>
+                <a:ea typeface="Microsoft YaHei"/>
+              </a:rPr>
+              <a:t>比对手更弱、更少的 backbone 仍然 SOTA</a:t>
+            </a:r>
+            <a:r>
+              <a:rPr sz="1700" b="0">
+                <a:solidFill>
+                  <a:srgbClr val="1E1E1E"/>
+                </a:solidFill>
+                <a:latin typeface="Microsoft YaHei"/>
+                <a:ea typeface="Microsoft YaHei"/>
+              </a:rPr>
+              <a:t>（堵死“靠 backbone”的质疑）</a:t>
+            </a:r>
+          </a:p>
+        </p:txBody>
+      </p:sp>
+    </p:spTree>
+  </p:cSld>
+  <p:clrMapOvr>
+    <a:masterClrMapping/>
+  </p:clrMapOvr>
+</p:sld>
+</file>
+
 <file path=ppt/slides/slide9.xml><?xml version="1.0" encoding="utf-8"?>
 <p:sld xmlns:a="http://schemas.openxmlformats.org/drawingml/2006/main" xmlns:p="http://schemas.openxmlformats.org/presentationml/2006/main" xmlns:r="http://schemas.openxmlformats.org/officeDocument/2006/relationships">
   <p:cSld>
@@ -5830,7 +5576,7 @@
                 <a:latin typeface="Microsoft YaHei"/>
                 <a:ea typeface="Microsoft YaHei"/>
               </a:rPr>
-              <a:t>诚实边界与进行中工作</a:t>
+              <a:t>总结</a:t>
             </a:r>
           </a:p>
         </p:txBody>
@@ -5875,7 +5621,7 @@
                 <a:latin typeface="Microsoft YaHei"/>
                 <a:ea typeface="Microsoft YaHei"/>
               </a:rPr>
-              <a:t>全监督 cIoU 仍有差距：52.71 vs 68.94（InstAlign）——已</a:t>
+              <a:t>训练-free RIS 的瓶颈不是 mask 质量，而是</a:t>
             </a:r>
             <a:r>
               <a:rPr sz="1700" b="1">
@@ -5885,7 +5631,7 @@
                 <a:latin typeface="Microsoft YaHei"/>
                 <a:ea typeface="Microsoft YaHei"/>
               </a:rPr>
-              <a:t>量化</a:t>
+              <a:t>选择（localization）</a:t>
             </a:r>
             <a:r>
               <a:rPr sz="1700" b="0">
@@ -5895,7 +5641,7 @@
                 <a:latin typeface="Microsoft YaHei"/>
                 <a:ea typeface="Microsoft YaHei"/>
               </a:rPr>
-              <a:t>，不声称</a:t>
+              <a:t>——oracle 分解实测</a:t>
             </a:r>
           </a:p>
         </p:txBody>
@@ -5940,7 +5686,27 @@
                 <a:latin typeface="Microsoft YaHei"/>
                 <a:ea typeface="Microsoft YaHei"/>
               </a:rPr>
-              <a:t>复现口径差异、VLM 延迟（0.6~1.8 s/句）均已在论文声明</a:t>
+              <a:t>冻结 VLM 的</a:t>
+            </a:r>
+            <a:r>
+              <a:rPr sz="1700" b="1">
+                <a:solidFill>
+                  <a:srgbClr val="1E1E1E"/>
+                </a:solidFill>
+                <a:latin typeface="Microsoft YaHei"/>
+                <a:ea typeface="Microsoft YaHei"/>
+              </a:rPr>
+              <a:t>全句 box 先验</a:t>
+            </a:r>
+            <a:r>
+              <a:rPr sz="1700" b="0">
+                <a:solidFill>
+                  <a:srgbClr val="1E1E1E"/>
+                </a:solidFill>
+                <a:latin typeface="Microsoft YaHei"/>
+                <a:ea typeface="Microsoft YaHei"/>
+              </a:rPr>
+              <a:t>把“选”修好；替代方案全部测过并被淘汰</a:t>
             </a:r>
           </a:p>
         </p:txBody>
@@ -5985,7 +5751,7 @@
                 <a:latin typeface="Microsoft YaHei"/>
                 <a:ea typeface="Microsoft YaHei"/>
               </a:rPr>
-              <a:t>进行中：</a:t>
+              <a:t>组件审计后</a:t>
             </a:r>
             <a:r>
               <a:rPr sz="1700" b="1">
@@ -5995,7 +5761,7 @@
                 <a:latin typeface="Microsoft YaHei"/>
                 <a:ea typeface="Microsoft YaHei"/>
               </a:rPr>
-              <a:t>backbone 削弱实验</a:t>
+              <a:t>自研选择头上位</a:t>
             </a:r>
             <a:r>
               <a:rPr sz="1700" b="0">
@@ -6005,7 +5771,17 @@
                 <a:latin typeface="Microsoft YaHei"/>
                 <a:ea typeface="Microsoft YaHei"/>
               </a:rPr>
-              <a:t>——更小的 VLM / 更小的 SAM / 更弱编码器 / 去掉额外检测器</a:t>
+              <a:t>，模型大头为本工作 → </a:t>
+            </a:r>
+            <a:r>
+              <a:rPr sz="1700" b="1">
+                <a:solidFill>
+                  <a:srgbClr val="1E1E1E"/>
+                </a:solidFill>
+                <a:latin typeface="Microsoft YaHei"/>
+                <a:ea typeface="Microsoft YaHei"/>
+              </a:rPr>
+              <a:t>16/16 全线超 published 旗舰</a:t>
             </a:r>
           </a:p>
         </p:txBody>
@@ -6050,27 +5826,7 @@
                 <a:latin typeface="Microsoft YaHei"/>
                 <a:ea typeface="Microsoft YaHei"/>
               </a:rPr>
-              <a:t>目标：</a:t>
-            </a:r>
-            <a:r>
-              <a:rPr sz="1700" b="1">
-                <a:solidFill>
-                  <a:srgbClr val="1E1E1E"/>
-                </a:solidFill>
-                <a:latin typeface="Microsoft YaHei"/>
-                <a:ea typeface="Microsoft YaHei"/>
-              </a:rPr>
-              <a:t>比对手更弱、更少的 backbone 仍然 SOTA</a:t>
-            </a:r>
-            <a:r>
-              <a:rPr sz="1700" b="0">
-                <a:solidFill>
-                  <a:srgbClr val="1E1E1E"/>
-                </a:solidFill>
-                <a:latin typeface="Microsoft YaHei"/>
-                <a:ea typeface="Microsoft YaHei"/>
-              </a:rPr>
-              <a:t>（堵死“靠 backbone”的质疑）</a:t>
+              <a:t>下一步：backbone 削弱验证 → 投稿；视频侧同类“proxy→val 反转”现象已完成测量</a:t>
             </a:r>
           </a:p>
         </p:txBody>

--- a/slides/presentation.pptx
+++ b/slides/presentation.pptx
@@ -5213,7 +5213,7 @@
                 <a:latin typeface="Microsoft YaHei"/>
                 <a:ea typeface="Microsoft YaHei"/>
               </a:rPr>
-              <a:t>诚实边界与进行中工作</a:t>
+              <a:t>诚实边界与组件必要性（实测）</a:t>
             </a:r>
           </a:p>
         </p:txBody>
@@ -5343,7 +5343,7 @@
                 <a:latin typeface="Microsoft YaHei"/>
                 <a:ea typeface="Microsoft YaHei"/>
               </a:rPr>
-              <a:t> 数字做跨环境对比，本地复现与余项在论文附录如实记录（不对其方法作评断）</a:t>
+              <a:t> 数字做跨环境对比（附录如实记录，不对其方法作评断）</a:t>
             </a:r>
           </a:p>
         </p:txBody>
@@ -5381,6 +5381,16 @@
               <a:t>●  </a:t>
             </a:r>
             <a:r>
+              <a:rPr sz="1700" b="1">
+                <a:solidFill>
+                  <a:srgbClr val="1E1E1E"/>
+                </a:solidFill>
+                <a:latin typeface="Microsoft YaHei"/>
+                <a:ea typeface="Microsoft YaHei"/>
+              </a:rPr>
+              <a:t>更小的 VLM 更好</a:t>
+            </a:r>
+            <a:r>
               <a:rPr sz="1700" b="0">
                 <a:solidFill>
                   <a:srgbClr val="1E1E1E"/>
@@ -5388,7 +5398,27 @@
                 <a:latin typeface="Microsoft YaHei"/>
                 <a:ea typeface="Microsoft YaHei"/>
               </a:rPr>
-              <a:t>VLM 延迟（0.6~1.8 s/句）已在论文声明</a:t>
+              <a:t>：3.8B Qwen2.5-VL </a:t>
+            </a:r>
+            <a:r>
+              <a:rPr sz="1700" b="1">
+                <a:solidFill>
+                  <a:srgbClr val="1E1E1E"/>
+                </a:solidFill>
+                <a:latin typeface="Microsoft YaHei"/>
+                <a:ea typeface="Microsoft YaHei"/>
+              </a:rPr>
+              <a:t>73.57 / 67.64 / 66.43</a:t>
+            </a:r>
+            <a:r>
+              <a:rPr sz="1700" b="0">
+                <a:solidFill>
+                  <a:srgbClr val="1E1E1E"/>
+                </a:solidFill>
+                <a:latin typeface="Microsoft YaHei"/>
+                <a:ea typeface="Microsoft YaHei"/>
+              </a:rPr>
+              <a:t> &gt; 现役 7B（70.57 / 66.35 / 65.51）——定位能力由模型家族决定，不由尺寸</a:t>
             </a:r>
           </a:p>
         </p:txBody>
@@ -5426,6 +5456,16 @@
               <a:t>●  </a:t>
             </a:r>
             <a:r>
+              <a:rPr sz="1700" b="1">
+                <a:solidFill>
+                  <a:srgbClr val="1E1E1E"/>
+                </a:solidFill>
+                <a:latin typeface="Microsoft YaHei"/>
+                <a:ea typeface="Microsoft YaHei"/>
+              </a:rPr>
+              <a:t>更弱的平台仍 SOTA</a:t>
+            </a:r>
+            <a:r>
               <a:rPr sz="1700" b="0">
                 <a:solidFill>
                   <a:srgbClr val="1E1E1E"/>
@@ -5433,7 +5473,7 @@
                 <a:latin typeface="Microsoft YaHei"/>
                 <a:ea typeface="Microsoft YaHei"/>
               </a:rPr>
-              <a:t>进行中：</a:t>
+              <a:t>：换普通 masked-region CLIP 不掉线（−0.2~0.4）；</a:t>
             </a:r>
             <a:r>
               <a:rPr sz="1700" b="1">
@@ -5443,17 +5483,7 @@
                 <a:latin typeface="Microsoft YaHei"/>
                 <a:ea typeface="Microsoft YaHei"/>
               </a:rPr>
-              <a:t>backbone 削弱实验</a:t>
-            </a:r>
-            <a:r>
-              <a:rPr sz="1700" b="0">
-                <a:solidFill>
-                  <a:srgbClr val="1E1E1E"/>
-                </a:solidFill>
-                <a:latin typeface="Microsoft YaHei"/>
-                <a:ea typeface="Microsoft YaHei"/>
-              </a:rPr>
-              <a:t>——更小的 VLM / 更小的 SAM / 更弱编码器 / 去掉额外检测器</a:t>
+              <a:t>极简版仅 2 个模型（SAM+VLM）仍全线超 published</a:t>
             </a:r>
           </a:p>
         </p:txBody>
@@ -5498,27 +5528,7 @@
                 <a:latin typeface="Microsoft YaHei"/>
                 <a:ea typeface="Microsoft YaHei"/>
               </a:rPr>
-              <a:t>目标：</a:t>
-            </a:r>
-            <a:r>
-              <a:rPr sz="1700" b="1">
-                <a:solidFill>
-                  <a:srgbClr val="1E1E1E"/>
-                </a:solidFill>
-                <a:latin typeface="Microsoft YaHei"/>
-                <a:ea typeface="Microsoft YaHei"/>
-              </a:rPr>
-              <a:t>比对手更弱、更少的 backbone 仍然 SOTA</a:t>
-            </a:r>
-            <a:r>
-              <a:rPr sz="1700" b="0">
-                <a:solidFill>
-                  <a:srgbClr val="1E1E1E"/>
-                </a:solidFill>
-                <a:latin typeface="Microsoft YaHei"/>
-                <a:ea typeface="Microsoft YaHei"/>
-              </a:rPr>
-              <a:t>（堵死“靠 backbone”的质疑）</a:t>
+              <a:t>实测边界如实保留：SAM ViT-B 在 RefCOCOg 差 0.28；gRefCOCO 去检测器低于地板</a:t>
             </a:r>
           </a:p>
         </p:txBody>

--- a/slides/presentation.pptx
+++ b/slides/presentation.pptx
@@ -3722,7 +3722,7 @@
                 <a:latin typeface="Microsoft YaHei"/>
                 <a:ea typeface="Microsoft YaHei"/>
               </a:rPr>
-              <a:t>（82% 表达式池里已有好 mask）；所基于的 HybridGL released pipeline 只拿到 </a:t>
+              <a:t>（93% 表达式池里已有好 mask）；所基于的 HybridGL released pipeline 只拿到 </a:t>
             </a:r>
             <a:r>
               <a:rPr sz="1700" b="1">

--- a/slides/presentation.pptx
+++ b/slides/presentation.pptx
@@ -3251,7 +3251,7 @@
                 <a:latin typeface="Microsoft YaHei"/>
                 <a:ea typeface="Microsoft YaHei"/>
               </a:rPr>
-              <a:t>RefCOCO 70.57 mIoU　·　gRefCOCO 52.71 cIoU　·　16/16 指标超 published 旗舰</a:t>
+              <a:t>RefCOCO 70.57 mIoU　·　gRefCOCO 47.59 cIoU　·　16/16 指标超 published 旗舰</a:t>
             </a:r>
           </a:p>
         </p:txBody>
@@ -3876,6 +3876,61 @@
         <p:spPr>
           <a:xfrm>
             <a:off x="777240" y="4297680"/>
+            <a:ext cx="10607040" cy="822960"/>
+          </a:xfrm>
+          <a:prstGeom prst="rect">
+            <a:avLst/>
+          </a:prstGeom>
+          <a:noFill/>
+        </p:spPr>
+        <p:txBody>
+          <a:bodyPr wrap="square">
+            <a:spAutoFit/>
+          </a:bodyPr>
+          <a:lstStyle/>
+          <a:p>
+            <a:r>
+              <a:rPr sz="1700" b="1">
+                <a:solidFill>
+                  <a:srgbClr val="2563EB"/>
+                </a:solidFill>
+                <a:latin typeface="Microsoft YaHei"/>
+                <a:ea typeface="Microsoft YaHei"/>
+              </a:rPr>
+              <a:t>●  </a:t>
+            </a:r>
+            <a:r>
+              <a:rPr sz="1700" b="0">
+                <a:solidFill>
+                  <a:srgbClr val="1E1E1E"/>
+                </a:solidFill>
+                <a:latin typeface="Microsoft YaHei"/>
+                <a:ea typeface="Microsoft YaHei"/>
+              </a:rPr>
+              <a:t>多管线复核：HybridGL 与 GLOD-RIS 两条独立选择器上，wrong-instance 占可回收质量的 </a:t>
+            </a:r>
+            <a:r>
+              <a:rPr sz="1700" b="1">
+                <a:solidFill>
+                  <a:srgbClr val="1E1E1E"/>
+                </a:solidFill>
+                <a:latin typeface="Microsoft YaHei"/>
+                <a:ea typeface="Microsoft YaHei"/>
+              </a:rPr>
+              <a:t>92%–94%</a:t>
+            </a:r>
+          </a:p>
+        </p:txBody>
+      </p:sp>
+      <p:sp>
+        <p:nvSpPr>
+          <p:cNvPr id="7" name="TextBox 6"/>
+          <p:cNvSpPr txBox="1"/>
+          <p:nvPr/>
+        </p:nvSpPr>
+        <p:spPr>
+          <a:xfrm>
+            <a:off x="777240" y="5257800"/>
             <a:ext cx="10607040" cy="822960"/>
           </a:xfrm>
           <a:prstGeom prst="rect">
@@ -5050,7 +5105,7 @@
                 <a:latin typeface="Microsoft YaHei"/>
                 <a:ea typeface="Microsoft YaHei"/>
               </a:rPr>
-              <a:t>gRefCOCO：cIoU </a:t>
+              <a:t>gRefCOCO（</a:t>
             </a:r>
             <a:r>
               <a:rPr sz="1600" b="1">
@@ -5060,7 +5115,7 @@
                 <a:latin typeface="Microsoft YaHei"/>
                 <a:ea typeface="Microsoft YaHei"/>
               </a:rPr>
-              <a:t>52.71</a:t>
+              <a:t>DINO-free</a:t>
             </a:r>
             <a:r>
               <a:rPr sz="1600" b="0">
@@ -5070,6 +5125,26 @@
                 <a:latin typeface="Microsoft YaHei"/>
                 <a:ea typeface="Microsoft YaHei"/>
               </a:rPr>
+              <a:t>）：cIoU </a:t>
+            </a:r>
+            <a:r>
+              <a:rPr sz="1600" b="1">
+                <a:solidFill>
+                  <a:srgbClr val="1E1E1E"/>
+                </a:solidFill>
+                <a:latin typeface="Microsoft YaHei"/>
+                <a:ea typeface="Microsoft YaHei"/>
+              </a:rPr>
+              <a:t>47.59</a:t>
+            </a:r>
+            <a:r>
+              <a:rPr sz="1600" b="0">
+                <a:solidFill>
+                  <a:srgbClr val="1E1E1E"/>
+                </a:solidFill>
+                <a:latin typeface="Microsoft YaHei"/>
+                <a:ea typeface="Microsoft YaHei"/>
+              </a:rPr>
               <a:t>、gIoU </a:t>
             </a:r>
             <a:r>
@@ -5080,7 +5155,7 @@
                 <a:latin typeface="Microsoft YaHei"/>
                 <a:ea typeface="Microsoft YaHei"/>
               </a:rPr>
-              <a:t>75.08</a:t>
+              <a:t>73.78</a:t>
             </a:r>
             <a:r>
               <a:rPr sz="1600" b="0">
@@ -5090,27 +5165,7 @@
                 <a:latin typeface="Microsoft YaHei"/>
                 <a:ea typeface="Microsoft YaHei"/>
               </a:rPr>
-              <a:t>（</a:t>
-            </a:r>
-            <a:r>
-              <a:rPr sz="1600" b="1">
-                <a:solidFill>
-                  <a:srgbClr val="1E1E1E"/>
-                </a:solidFill>
-                <a:latin typeface="Microsoft YaHei"/>
-                <a:ea typeface="Microsoft YaHei"/>
-              </a:rPr>
-              <a:t>&gt; 全监督最强 InstAlign 74.34</a:t>
-            </a:r>
-            <a:r>
-              <a:rPr sz="1600" b="0">
-                <a:solidFill>
-                  <a:srgbClr val="1E1E1E"/>
-                </a:solidFill>
-                <a:latin typeface="Microsoft YaHei"/>
-                <a:ea typeface="Microsoft YaHei"/>
-              </a:rPr>
-              <a:t>，参考行）、N-acc 86.14</a:t>
+              <a:t>（距全监督最强 InstAlign 74.34 差 0.56）、N-acc 85.66</a:t>
             </a:r>
           </a:p>
         </p:txBody>
@@ -5258,7 +5313,7 @@
                 <a:latin typeface="Microsoft YaHei"/>
                 <a:ea typeface="Microsoft YaHei"/>
               </a:rPr>
-              <a:t>全监督 cIoU 仍有差距：52.71 vs 68.94（InstAlign）——已</a:t>
+              <a:t>全监督 cIoU 仍有差距：47.59 vs 68.94（InstAlign）——已</a:t>
             </a:r>
             <a:r>
               <a:rPr sz="1700" b="1">
@@ -5521,6 +5576,16 @@
               <a:t>●  </a:t>
             </a:r>
             <a:r>
+              <a:rPr sz="1700" b="1">
+                <a:solidFill>
+                  <a:srgbClr val="1E1E1E"/>
+                </a:solidFill>
+                <a:latin typeface="Microsoft YaHei"/>
+                <a:ea typeface="Microsoft YaHei"/>
+              </a:rPr>
+              <a:t>GroundingDINO 已删除</a:t>
+            </a:r>
+            <a:r>
               <a:rPr sz="1700" b="0">
                 <a:solidFill>
                   <a:srgbClr val="1E1E1E"/>
@@ -5528,7 +5593,7 @@
                 <a:latin typeface="Microsoft YaHei"/>
                 <a:ea typeface="Microsoft YaHei"/>
               </a:rPr>
-              <a:t>实测边界如实保留：SAM ViT-B 在 RefCOCOg 差 0.28；gRefCOCO 去检测器低于地板</a:t>
+              <a:t>：DINO-free gRefCOCO 47.59/73.78（比检测器版低 2.76/0.91，同类地板全清）；SAM ViT-B 在 RefCOCOg 仍差 0.28（边界保留）</a:t>
             </a:r>
           </a:p>
         </p:txBody>
